--- a/CalendarioAgo26/Ejercicios/E2_VLAN/Ejer2_VLANs.pptx
+++ b/CalendarioAgo26/Ejercicios/E2_VLAN/Ejer2_VLANs.pptx
@@ -143,240 +143,24 @@
   <pc:docChgLst>
     <pc:chgData name="Lizethe Pérez Fuertes" userId="4ae9ef87-2a7d-42f8-8dfa-0a501a9e2ff4" providerId="ADAL" clId="{FDDD45CB-1330-4033-A842-3D2746AFF7C7}"/>
     <pc:docChg chg="custSel modSld">
-      <pc:chgData name="Lizethe Pérez Fuertes" userId="4ae9ef87-2a7d-42f8-8dfa-0a501a9e2ff4" providerId="ADAL" clId="{FDDD45CB-1330-4033-A842-3D2746AFF7C7}" dt="2026-07-16T15:35:43.756" v="165" actId="1035"/>
+      <pc:chgData name="Lizethe Pérez Fuertes" userId="4ae9ef87-2a7d-42f8-8dfa-0a501a9e2ff4" providerId="ADAL" clId="{FDDD45CB-1330-4033-A842-3D2746AFF7C7}" dt="2026-09-23T23:56:28.667" v="178" actId="6549"/>
       <pc:docMkLst>
         <pc:docMk/>
       </pc:docMkLst>
       <pc:sldChg chg="addSp delSp modSp mod">
-        <pc:chgData name="Lizethe Pérez Fuertes" userId="4ae9ef87-2a7d-42f8-8dfa-0a501a9e2ff4" providerId="ADAL" clId="{FDDD45CB-1330-4033-A842-3D2746AFF7C7}" dt="2026-07-16T15:31:20.431" v="18" actId="6549"/>
+        <pc:chgData name="Lizethe Pérez Fuertes" userId="4ae9ef87-2a7d-42f8-8dfa-0a501a9e2ff4" providerId="ADAL" clId="{FDDD45CB-1330-4033-A842-3D2746AFF7C7}" dt="2026-09-23T23:56:28.667" v="178" actId="6549"/>
         <pc:sldMkLst>
           <pc:docMk/>
           <pc:sldMk cId="0" sldId="261"/>
         </pc:sldMkLst>
         <pc:spChg chg="mod">
-          <ac:chgData name="Lizethe Pérez Fuertes" userId="4ae9ef87-2a7d-42f8-8dfa-0a501a9e2ff4" providerId="ADAL" clId="{FDDD45CB-1330-4033-A842-3D2746AFF7C7}" dt="2026-07-16T15:31:20.431" v="18" actId="6549"/>
+          <ac:chgData name="Lizethe Pérez Fuertes" userId="4ae9ef87-2a7d-42f8-8dfa-0a501a9e2ff4" providerId="ADAL" clId="{FDDD45CB-1330-4033-A842-3D2746AFF7C7}" dt="2026-09-23T23:56:28.667" v="178" actId="6549"/>
           <ac:spMkLst>
             <pc:docMk/>
             <pc:sldMk cId="0" sldId="261"/>
             <ac:spMk id="2" creationId="{00000000-0000-0000-0000-000000000000}"/>
           </ac:spMkLst>
         </pc:spChg>
-        <pc:picChg chg="del">
-          <ac:chgData name="Lizethe Pérez Fuertes" userId="4ae9ef87-2a7d-42f8-8dfa-0a501a9e2ff4" providerId="ADAL" clId="{FDDD45CB-1330-4033-A842-3D2746AFF7C7}" dt="2026-07-16T15:30:53.106" v="6" actId="478"/>
-          <ac:picMkLst>
-            <pc:docMk/>
-            <pc:sldMk cId="0" sldId="261"/>
-            <ac:picMk id="4" creationId="{3C4A06BD-AB81-CF45-0C30-62662684406D}"/>
-          </ac:picMkLst>
-        </pc:picChg>
-        <pc:picChg chg="add mod ord">
-          <ac:chgData name="Lizethe Pérez Fuertes" userId="4ae9ef87-2a7d-42f8-8dfa-0a501a9e2ff4" providerId="ADAL" clId="{FDDD45CB-1330-4033-A842-3D2746AFF7C7}" dt="2026-07-16T15:31:14.824" v="14" actId="1076"/>
-          <ac:picMkLst>
-            <pc:docMk/>
-            <pc:sldMk cId="0" sldId="261"/>
-            <ac:picMk id="7" creationId="{1FC6379E-F626-E267-F18F-E661604B98F7}"/>
-          </ac:picMkLst>
-        </pc:picChg>
-      </pc:sldChg>
-      <pc:sldChg chg="addSp delSp modSp mod">
-        <pc:chgData name="Lizethe Pérez Fuertes" userId="4ae9ef87-2a7d-42f8-8dfa-0a501a9e2ff4" providerId="ADAL" clId="{FDDD45CB-1330-4033-A842-3D2746AFF7C7}" dt="2026-07-16T15:33:01.395" v="126" actId="1076"/>
-        <pc:sldMkLst>
-          <pc:docMk/>
-          <pc:sldMk cId="536682890" sldId="340"/>
-        </pc:sldMkLst>
-        <pc:spChg chg="mod">
-          <ac:chgData name="Lizethe Pérez Fuertes" userId="4ae9ef87-2a7d-42f8-8dfa-0a501a9e2ff4" providerId="ADAL" clId="{FDDD45CB-1330-4033-A842-3D2746AFF7C7}" dt="2026-07-16T15:32:36.353" v="119" actId="1038"/>
-          <ac:spMkLst>
-            <pc:docMk/>
-            <pc:sldMk cId="536682890" sldId="340"/>
-            <ac:spMk id="10" creationId="{20FF2611-1ED3-4786-87DA-8B97BDD6D4E8}"/>
-          </ac:spMkLst>
-        </pc:spChg>
-        <pc:spChg chg="mod">
-          <ac:chgData name="Lizethe Pérez Fuertes" userId="4ae9ef87-2a7d-42f8-8dfa-0a501a9e2ff4" providerId="ADAL" clId="{FDDD45CB-1330-4033-A842-3D2746AFF7C7}" dt="2026-07-16T15:32:44.844" v="120" actId="1076"/>
-          <ac:spMkLst>
-            <pc:docMk/>
-            <pc:sldMk cId="536682890" sldId="340"/>
-            <ac:spMk id="14" creationId="{7646E0FB-7123-46AC-A020-B0A72B7A742A}"/>
-          </ac:spMkLst>
-        </pc:spChg>
-        <pc:spChg chg="mod">
-          <ac:chgData name="Lizethe Pérez Fuertes" userId="4ae9ef87-2a7d-42f8-8dfa-0a501a9e2ff4" providerId="ADAL" clId="{FDDD45CB-1330-4033-A842-3D2746AFF7C7}" dt="2026-07-16T15:32:44.844" v="120" actId="1076"/>
-          <ac:spMkLst>
-            <pc:docMk/>
-            <pc:sldMk cId="536682890" sldId="340"/>
-            <ac:spMk id="15" creationId="{8EA805EE-8667-4E41-9C93-A92AA57345F0}"/>
-          </ac:spMkLst>
-        </pc:spChg>
-        <pc:spChg chg="mod">
-          <ac:chgData name="Lizethe Pérez Fuertes" userId="4ae9ef87-2a7d-42f8-8dfa-0a501a9e2ff4" providerId="ADAL" clId="{FDDD45CB-1330-4033-A842-3D2746AFF7C7}" dt="2026-07-16T15:32:44.844" v="120" actId="1076"/>
-          <ac:spMkLst>
-            <pc:docMk/>
-            <pc:sldMk cId="536682890" sldId="340"/>
-            <ac:spMk id="16" creationId="{78C57497-126C-4137-A1FF-E5303A262B69}"/>
-          </ac:spMkLst>
-        </pc:spChg>
-        <pc:picChg chg="del">
-          <ac:chgData name="Lizethe Pérez Fuertes" userId="4ae9ef87-2a7d-42f8-8dfa-0a501a9e2ff4" providerId="ADAL" clId="{FDDD45CB-1330-4033-A842-3D2746AFF7C7}" dt="2026-07-16T15:31:53.579" v="33" actId="478"/>
-          <ac:picMkLst>
-            <pc:docMk/>
-            <pc:sldMk cId="536682890" sldId="340"/>
-            <ac:picMk id="4" creationId="{437C3F30-5546-D30E-0AB9-D4BC26D95EED}"/>
-          </ac:picMkLst>
-        </pc:picChg>
-        <pc:picChg chg="add mod ord">
-          <ac:chgData name="Lizethe Pérez Fuertes" userId="4ae9ef87-2a7d-42f8-8dfa-0a501a9e2ff4" providerId="ADAL" clId="{FDDD45CB-1330-4033-A842-3D2746AFF7C7}" dt="2026-07-16T15:33:01.395" v="126" actId="1076"/>
-          <ac:picMkLst>
-            <pc:docMk/>
-            <pc:sldMk cId="536682890" sldId="340"/>
-            <ac:picMk id="5" creationId="{7EB36242-E63B-7C10-7453-E6C4FED0A756}"/>
-          </ac:picMkLst>
-        </pc:picChg>
-      </pc:sldChg>
-      <pc:sldChg chg="modSp mod">
-        <pc:chgData name="Lizethe Pérez Fuertes" userId="4ae9ef87-2a7d-42f8-8dfa-0a501a9e2ff4" providerId="ADAL" clId="{FDDD45CB-1330-4033-A842-3D2746AFF7C7}" dt="2026-07-16T15:33:28.919" v="136" actId="20577"/>
-        <pc:sldMkLst>
-          <pc:docMk/>
-          <pc:sldMk cId="1245641084" sldId="347"/>
-        </pc:sldMkLst>
-        <pc:graphicFrameChg chg="modGraphic">
-          <ac:chgData name="Lizethe Pérez Fuertes" userId="4ae9ef87-2a7d-42f8-8dfa-0a501a9e2ff4" providerId="ADAL" clId="{FDDD45CB-1330-4033-A842-3D2746AFF7C7}" dt="2026-07-16T15:33:28.919" v="136" actId="20577"/>
-          <ac:graphicFrameMkLst>
-            <pc:docMk/>
-            <pc:sldMk cId="1245641084" sldId="347"/>
-            <ac:graphicFrameMk id="5" creationId="{D5DA73BA-9C18-4089-BD14-C3684A90530F}"/>
-          </ac:graphicFrameMkLst>
-        </pc:graphicFrameChg>
-      </pc:sldChg>
-      <pc:sldChg chg="addSp delSp modSp mod">
-        <pc:chgData name="Lizethe Pérez Fuertes" userId="4ae9ef87-2a7d-42f8-8dfa-0a501a9e2ff4" providerId="ADAL" clId="{FDDD45CB-1330-4033-A842-3D2746AFF7C7}" dt="2026-07-16T15:34:44.888" v="151" actId="1076"/>
-        <pc:sldMkLst>
-          <pc:docMk/>
-          <pc:sldMk cId="1366278812" sldId="350"/>
-        </pc:sldMkLst>
-        <pc:picChg chg="add mod">
-          <ac:chgData name="Lizethe Pérez Fuertes" userId="4ae9ef87-2a7d-42f8-8dfa-0a501a9e2ff4" providerId="ADAL" clId="{FDDD45CB-1330-4033-A842-3D2746AFF7C7}" dt="2026-07-16T15:34:44.888" v="151" actId="1076"/>
-          <ac:picMkLst>
-            <pc:docMk/>
-            <pc:sldMk cId="1366278812" sldId="350"/>
-            <ac:picMk id="3" creationId="{A4FCED27-44F7-B5DD-C6C3-C64F6325FDB2}"/>
-          </ac:picMkLst>
-        </pc:picChg>
-        <pc:picChg chg="del mod">
-          <ac:chgData name="Lizethe Pérez Fuertes" userId="4ae9ef87-2a7d-42f8-8dfa-0a501a9e2ff4" providerId="ADAL" clId="{FDDD45CB-1330-4033-A842-3D2746AFF7C7}" dt="2026-07-16T15:34:15.457" v="138" actId="478"/>
-          <ac:picMkLst>
-            <pc:docMk/>
-            <pc:sldMk cId="1366278812" sldId="350"/>
-            <ac:picMk id="9" creationId="{F76F994E-0F35-44F5-A9CB-1E113067284B}"/>
-          </ac:picMkLst>
-        </pc:picChg>
-      </pc:sldChg>
-      <pc:sldChg chg="addSp delSp modSp mod">
-        <pc:chgData name="Lizethe Pérez Fuertes" userId="4ae9ef87-2a7d-42f8-8dfa-0a501a9e2ff4" providerId="ADAL" clId="{FDDD45CB-1330-4033-A842-3D2746AFF7C7}" dt="2026-07-16T15:35:43.756" v="165" actId="1035"/>
-        <pc:sldMkLst>
-          <pc:docMk/>
-          <pc:sldMk cId="2900857448" sldId="351"/>
-        </pc:sldMkLst>
-        <pc:picChg chg="del">
-          <ac:chgData name="Lizethe Pérez Fuertes" userId="4ae9ef87-2a7d-42f8-8dfa-0a501a9e2ff4" providerId="ADAL" clId="{FDDD45CB-1330-4033-A842-3D2746AFF7C7}" dt="2026-07-16T15:35:09.073" v="155" actId="478"/>
-          <ac:picMkLst>
-            <pc:docMk/>
-            <pc:sldMk cId="2900857448" sldId="351"/>
-            <ac:picMk id="2" creationId="{E2F6BCE3-CFFE-1F56-44EF-7E4988D5255E}"/>
-          </ac:picMkLst>
-        </pc:picChg>
-        <pc:picChg chg="add mod">
-          <ac:chgData name="Lizethe Pérez Fuertes" userId="4ae9ef87-2a7d-42f8-8dfa-0a501a9e2ff4" providerId="ADAL" clId="{FDDD45CB-1330-4033-A842-3D2746AFF7C7}" dt="2026-07-16T15:35:43.756" v="165" actId="1035"/>
-          <ac:picMkLst>
-            <pc:docMk/>
-            <pc:sldMk cId="2900857448" sldId="351"/>
-            <ac:picMk id="4" creationId="{65E173F4-1444-0676-E450-1ED71E4A722C}"/>
-          </ac:picMkLst>
-        </pc:picChg>
-      </pc:sldChg>
-      <pc:sldChg chg="addSp delSp modSp mod">
-        <pc:chgData name="Lizethe Pérez Fuertes" userId="4ae9ef87-2a7d-42f8-8dfa-0a501a9e2ff4" providerId="ADAL" clId="{FDDD45CB-1330-4033-A842-3D2746AFF7C7}" dt="2026-07-16T15:35:05.574" v="154" actId="1076"/>
-        <pc:sldMkLst>
-          <pc:docMk/>
-          <pc:sldMk cId="3465871034" sldId="356"/>
-        </pc:sldMkLst>
-        <pc:picChg chg="add mod">
-          <ac:chgData name="Lizethe Pérez Fuertes" userId="4ae9ef87-2a7d-42f8-8dfa-0a501a9e2ff4" providerId="ADAL" clId="{FDDD45CB-1330-4033-A842-3D2746AFF7C7}" dt="2026-07-16T15:35:05.574" v="154" actId="1076"/>
-          <ac:picMkLst>
-            <pc:docMk/>
-            <pc:sldMk cId="3465871034" sldId="356"/>
-            <ac:picMk id="3" creationId="{903488BB-D304-3D81-6175-3B157E2EC8EE}"/>
-          </ac:picMkLst>
-        </pc:picChg>
-        <pc:picChg chg="del">
-          <ac:chgData name="Lizethe Pérez Fuertes" userId="4ae9ef87-2a7d-42f8-8dfa-0a501a9e2ff4" providerId="ADAL" clId="{FDDD45CB-1330-4033-A842-3D2746AFF7C7}" dt="2026-07-16T15:35:02.321" v="152" actId="478"/>
-          <ac:picMkLst>
-            <pc:docMk/>
-            <pc:sldMk cId="3465871034" sldId="356"/>
-            <ac:picMk id="6" creationId="{3536F73B-FC93-81EC-414C-255EAB61D99A}"/>
-          </ac:picMkLst>
-        </pc:picChg>
-      </pc:sldChg>
-      <pc:sldChg chg="addSp delSp modSp mod">
-        <pc:chgData name="Lizethe Pérez Fuertes" userId="4ae9ef87-2a7d-42f8-8dfa-0a501a9e2ff4" providerId="ADAL" clId="{FDDD45CB-1330-4033-A842-3D2746AFF7C7}" dt="2026-07-16T15:31:45.374" v="32" actId="1076"/>
-        <pc:sldMkLst>
-          <pc:docMk/>
-          <pc:sldMk cId="4218665958" sldId="357"/>
-        </pc:sldMkLst>
-        <pc:picChg chg="del">
-          <ac:chgData name="Lizethe Pérez Fuertes" userId="4ae9ef87-2a7d-42f8-8dfa-0a501a9e2ff4" providerId="ADAL" clId="{FDDD45CB-1330-4033-A842-3D2746AFF7C7}" dt="2026-07-16T15:31:40.114" v="29" actId="478"/>
-          <ac:picMkLst>
-            <pc:docMk/>
-            <pc:sldMk cId="4218665958" sldId="357"/>
-            <ac:picMk id="3" creationId="{0D4565B0-66DB-CEEC-D4E6-F5F697386232}"/>
-          </ac:picMkLst>
-        </pc:picChg>
-        <pc:picChg chg="add mod">
-          <ac:chgData name="Lizethe Pérez Fuertes" userId="4ae9ef87-2a7d-42f8-8dfa-0a501a9e2ff4" providerId="ADAL" clId="{FDDD45CB-1330-4033-A842-3D2746AFF7C7}" dt="2026-07-16T15:31:45.374" v="32" actId="1076"/>
-          <ac:picMkLst>
-            <pc:docMk/>
-            <pc:sldMk cId="4218665958" sldId="357"/>
-            <ac:picMk id="5" creationId="{FD68B18C-95B2-BE80-B022-C11E3DD95D32}"/>
-          </ac:picMkLst>
-        </pc:picChg>
-      </pc:sldChg>
-      <pc:sldChg chg="addSp delSp mod">
-        <pc:chgData name="Lizethe Pérez Fuertes" userId="4ae9ef87-2a7d-42f8-8dfa-0a501a9e2ff4" providerId="ADAL" clId="{FDDD45CB-1330-4033-A842-3D2746AFF7C7}" dt="2026-07-16T15:30:47.948" v="5" actId="22"/>
-        <pc:sldMkLst>
-          <pc:docMk/>
-          <pc:sldMk cId="3906166291" sldId="359"/>
-        </pc:sldMkLst>
-        <pc:picChg chg="add">
-          <ac:chgData name="Lizethe Pérez Fuertes" userId="4ae9ef87-2a7d-42f8-8dfa-0a501a9e2ff4" providerId="ADAL" clId="{FDDD45CB-1330-4033-A842-3D2746AFF7C7}" dt="2026-07-16T15:30:47.948" v="5" actId="22"/>
-          <ac:picMkLst>
-            <pc:docMk/>
-            <pc:sldMk cId="3906166291" sldId="359"/>
-            <ac:picMk id="4" creationId="{629ACC14-B20F-41D2-2826-EA29782D6109}"/>
-          </ac:picMkLst>
-        </pc:picChg>
-        <pc:picChg chg="del">
-          <ac:chgData name="Lizethe Pérez Fuertes" userId="4ae9ef87-2a7d-42f8-8dfa-0a501a9e2ff4" providerId="ADAL" clId="{FDDD45CB-1330-4033-A842-3D2746AFF7C7}" dt="2026-07-16T15:30:47.566" v="4" actId="478"/>
-          <ac:picMkLst>
-            <pc:docMk/>
-            <pc:sldMk cId="3906166291" sldId="359"/>
-            <ac:picMk id="6" creationId="{22333EBF-42F1-1F25-0BFB-07DFDE30AEC3}"/>
-          </ac:picMkLst>
-        </pc:picChg>
-      </pc:sldChg>
-      <pc:sldChg chg="modSp mod">
-        <pc:chgData name="Lizethe Pérez Fuertes" userId="4ae9ef87-2a7d-42f8-8dfa-0a501a9e2ff4" providerId="ADAL" clId="{FDDD45CB-1330-4033-A842-3D2746AFF7C7}" dt="2026-07-16T15:31:34.067" v="28" actId="20577"/>
-        <pc:sldMkLst>
-          <pc:docMk/>
-          <pc:sldMk cId="1392632694" sldId="360"/>
-        </pc:sldMkLst>
-        <pc:graphicFrameChg chg="modGraphic">
-          <ac:chgData name="Lizethe Pérez Fuertes" userId="4ae9ef87-2a7d-42f8-8dfa-0a501a9e2ff4" providerId="ADAL" clId="{FDDD45CB-1330-4033-A842-3D2746AFF7C7}" dt="2026-07-16T15:31:34.067" v="28" actId="20577"/>
-          <ac:graphicFrameMkLst>
-            <pc:docMk/>
-            <pc:sldMk cId="1392632694" sldId="360"/>
-            <ac:graphicFrameMk id="3" creationId="{D4EF5B48-9283-3FB1-AEA0-33B024D5E95A}"/>
-          </ac:graphicFrameMkLst>
-        </pc:graphicFrameChg>
       </pc:sldChg>
     </pc:docChg>
   </pc:docChgLst>
@@ -1432,7 +1216,7 @@
           <a:p>
             <a:fld id="{1D8BD707-D9CF-40AE-B4C6-C98DA3205C09}" type="datetimeFigureOut">
               <a:rPr lang="en-US"/>
-              <a:t>7/16/2026</a:t>
+              <a:t>9/23/2026</a:t>
             </a:fld>
             <a:endParaRPr lang="en-US" dirty="0"/>
           </a:p>
@@ -1609,7 +1393,7 @@
           <a:p>
             <a:fld id="{1D8BD707-D9CF-40AE-B4C6-C98DA3205C09}" type="datetimeFigureOut">
               <a:rPr lang="en-US"/>
-              <a:t>7/16/2026</a:t>
+              <a:t>9/23/2026</a:t>
             </a:fld>
             <a:endParaRPr lang="en-US" dirty="0"/>
           </a:p>
@@ -1823,7 +1607,7 @@
           <a:p>
             <a:fld id="{1D8BD707-D9CF-40AE-B4C6-C98DA3205C09}" type="datetimeFigureOut">
               <a:rPr lang="en-US"/>
-              <a:t>7/16/2026</a:t>
+              <a:t>9/23/2026</a:t>
             </a:fld>
             <a:endParaRPr lang="en-US" dirty="0"/>
           </a:p>
@@ -1971,7 +1755,7 @@
           <a:p>
             <a:fld id="{1D8BD707-D9CF-40AE-B4C6-C98DA3205C09}" type="datetimeFigureOut">
               <a:rPr lang="en-US"/>
-              <a:t>7/16/2026</a:t>
+              <a:t>9/23/2026</a:t>
             </a:fld>
             <a:endParaRPr lang="en-US" dirty="0"/>
           </a:p>
@@ -2127,7 +1911,7 @@
           <a:p>
             <a:fld id="{1D8BD707-D9CF-40AE-B4C6-C98DA3205C09}" type="datetimeFigureOut">
               <a:rPr lang="en-US"/>
-              <a:t>7/16/2026</a:t>
+              <a:t>9/23/2026</a:t>
             </a:fld>
             <a:endParaRPr lang="en-US" dirty="0"/>
           </a:p>
@@ -2212,7 +1996,7 @@
           <a:p>
             <a:fld id="{5E75A0DC-66C6-4CEC-A5EB-F8C97CEC3796}" type="datetimeFigureOut">
               <a:rPr lang="es-MX" smtClean="0"/>
-              <a:t>16/07/2026</a:t>
+              <a:t>23/09/2026</a:t>
             </a:fld>
             <a:endParaRPr lang="es-MX" dirty="0"/>
           </a:p>
@@ -2469,7 +2253,7 @@
           <a:p>
             <a:fld id="{5E75A0DC-66C6-4CEC-A5EB-F8C97CEC3796}" type="datetimeFigureOut">
               <a:rPr lang="es-MX" smtClean="0"/>
-              <a:t>16/07/2026</a:t>
+              <a:t>23/09/2026</a:t>
             </a:fld>
             <a:endParaRPr lang="es-MX" dirty="0"/>
           </a:p>
@@ -2719,7 +2503,7 @@
           <a:p>
             <a:fld id="{1D8BD707-D9CF-40AE-B4C6-C98DA3205C09}" type="datetimeFigureOut">
               <a:rPr lang="en-US"/>
-              <a:t>7/16/2026</a:t>
+              <a:t>9/23/2026</a:t>
             </a:fld>
             <a:endParaRPr lang="en-US" dirty="0"/>
           </a:p>
@@ -7260,11 +7044,18 @@
               <a:t>(</a:t>
             </a:r>
             <a:r>
+              <a:rPr lang="es-MX" sz="1600" spc="-5">
+                <a:latin typeface="Arial" panose="020B0604020202020204" pitchFamily="34" charset="0"/>
+                <a:cs typeface="Arial" panose="020B0604020202020204" pitchFamily="34" charset="0"/>
+              </a:rPr>
+              <a:t>Gestion</a:t>
+            </a:r>
+            <a:r>
               <a:rPr lang="es-MX" sz="1600" spc="-5" dirty="0">
                 <a:latin typeface="Arial" panose="020B0604020202020204" pitchFamily="34" charset="0"/>
                 <a:cs typeface="Arial" panose="020B0604020202020204" pitchFamily="34" charset="0"/>
               </a:rPr>
-              <a:t>Native, </a:t>
+              <a:t>, </a:t>
             </a:r>
             <a:r>
               <a:rPr sz="1600" spc="-5" dirty="0">
